--- a/presentation/Loom_Major_Project_Presentation.pptx
+++ b/presentation/Loom_Major_Project_Presentation.pptx
@@ -4399,7 +4399,7 @@
                 <a:ea typeface="Calibri" pitchFamily="34" charset="-122"/>
                 <a:cs typeface="Calibri" pitchFamily="34" charset="-120"/>
               </a:rPr>
-              <a:t>Roll No. 231453</a:t>
+              <a:t>Roll No. 231435</a:t>
             </a:r>
             <a:endParaRPr lang="en-US" sz="1150" dirty="0"/>
           </a:p>
